--- a/01_Data_Scientist/LLM/1-Basics.pptx
+++ b/01_Data_Scientist/LLM/1-Basics.pptx
@@ -14522,30 +14522,522 @@
           </a:p>
         </p:txBody>
       </p:sp>
-      <p:pic>
-        <p:nvPicPr>
-          <p:cNvPr id="4" name="图片 3"/>
-          <p:cNvPicPr>
-            <a:picLocks noChangeAspect="1"/>
-          </p:cNvPicPr>
+      <p:sp>
+        <p:nvSpPr>
+          <p:cNvPr id="44" name="燕尾形 43"/>
+          <p:cNvSpPr/>
           <p:nvPr/>
-        </p:nvPicPr>
-        <p:blipFill>
-          <a:blip r:embed="rId1"/>
-          <a:stretch>
-            <a:fillRect/>
-          </a:stretch>
-        </p:blipFill>
+        </p:nvSpPr>
         <p:spPr>
           <a:xfrm>
-            <a:off x="4799330" y="282575"/>
-            <a:ext cx="7010400" cy="2752725"/>
+            <a:off x="911860" y="1280795"/>
+            <a:ext cx="1720215" cy="354965"/>
+          </a:xfrm>
+          <a:prstGeom prst="chevron">
+            <a:avLst/>
+          </a:prstGeom>
+        </p:spPr>
+        <p:style>
+          <a:lnRef idx="2">
+            <a:schemeClr val="accent1">
+              <a:lumMod val="75000"/>
+            </a:schemeClr>
+          </a:lnRef>
+          <a:fillRef idx="1">
+            <a:schemeClr val="accent1"/>
+          </a:fillRef>
+          <a:effectRef idx="0">
+            <a:srgbClr val="FFFFFF"/>
+          </a:effectRef>
+          <a:fontRef idx="minor">
+            <a:schemeClr val="lt1"/>
+          </a:fontRef>
+        </p:style>
+        <p:txBody>
+          <a:bodyPr rtlCol="0" anchor="ctr"/>
+          <a:p>
+            <a:pPr algn="ctr"/>
+            <a:r>
+              <a:rPr lang="en-US" altLang="zh-CN"/>
+              <a:t>Scope</a:t>
+            </a:r>
+            <a:endParaRPr lang="en-US" altLang="zh-CN"/>
+          </a:p>
+        </p:txBody>
+      </p:sp>
+      <p:sp>
+        <p:nvSpPr>
+          <p:cNvPr id="46" name="燕尾形 45"/>
+          <p:cNvSpPr/>
+          <p:nvPr/>
+        </p:nvSpPr>
+        <p:spPr>
+          <a:xfrm>
+            <a:off x="2632075" y="1280795"/>
+            <a:ext cx="1720215" cy="354965"/>
+          </a:xfrm>
+          <a:prstGeom prst="chevron">
+            <a:avLst/>
+          </a:prstGeom>
+        </p:spPr>
+        <p:style>
+          <a:lnRef idx="2">
+            <a:schemeClr val="accent1">
+              <a:lumMod val="75000"/>
+            </a:schemeClr>
+          </a:lnRef>
+          <a:fillRef idx="1">
+            <a:schemeClr val="accent1"/>
+          </a:fillRef>
+          <a:effectRef idx="0">
+            <a:srgbClr val="FFFFFF"/>
+          </a:effectRef>
+          <a:fontRef idx="minor">
+            <a:schemeClr val="lt1"/>
+          </a:fontRef>
+        </p:style>
+        <p:txBody>
+          <a:bodyPr rtlCol="0" anchor="ctr"/>
+          <a:p>
+            <a:pPr algn="ctr"/>
+            <a:r>
+              <a:rPr lang="en-US" altLang="zh-CN"/>
+              <a:t>Select</a:t>
+            </a:r>
+            <a:endParaRPr lang="en-US" altLang="zh-CN"/>
+          </a:p>
+        </p:txBody>
+      </p:sp>
+      <p:sp>
+        <p:nvSpPr>
+          <p:cNvPr id="48" name="燕尾形 47"/>
+          <p:cNvSpPr/>
+          <p:nvPr/>
+        </p:nvSpPr>
+        <p:spPr>
+          <a:xfrm>
+            <a:off x="4352290" y="1280795"/>
+            <a:ext cx="3440430" cy="354965"/>
+          </a:xfrm>
+          <a:prstGeom prst="chevron">
+            <a:avLst/>
+          </a:prstGeom>
+        </p:spPr>
+        <p:style>
+          <a:lnRef idx="2">
+            <a:schemeClr val="accent1">
+              <a:lumMod val="75000"/>
+            </a:schemeClr>
+          </a:lnRef>
+          <a:fillRef idx="1">
+            <a:schemeClr val="accent1"/>
+          </a:fillRef>
+          <a:effectRef idx="0">
+            <a:srgbClr val="FFFFFF"/>
+          </a:effectRef>
+          <a:fontRef idx="minor">
+            <a:schemeClr val="lt1"/>
+          </a:fontRef>
+        </p:style>
+        <p:txBody>
+          <a:bodyPr rtlCol="0" anchor="ctr"/>
+          <a:p>
+            <a:pPr algn="ctr"/>
+            <a:r>
+              <a:rPr lang="en-US" altLang="zh-CN"/>
+              <a:t>Modeling</a:t>
+            </a:r>
+            <a:endParaRPr lang="en-US" altLang="zh-CN"/>
+          </a:p>
+        </p:txBody>
+      </p:sp>
+      <p:sp>
+        <p:nvSpPr>
+          <p:cNvPr id="50" name="燕尾形 49"/>
+          <p:cNvSpPr/>
+          <p:nvPr/>
+        </p:nvSpPr>
+        <p:spPr>
+          <a:xfrm>
+            <a:off x="7792720" y="1280795"/>
+            <a:ext cx="3440430" cy="354965"/>
+          </a:xfrm>
+          <a:prstGeom prst="chevron">
+            <a:avLst/>
+          </a:prstGeom>
+        </p:spPr>
+        <p:style>
+          <a:lnRef idx="2">
+            <a:schemeClr val="accent1">
+              <a:lumMod val="75000"/>
+            </a:schemeClr>
+          </a:lnRef>
+          <a:fillRef idx="1">
+            <a:schemeClr val="accent1"/>
+          </a:fillRef>
+          <a:effectRef idx="0">
+            <a:srgbClr val="FFFFFF"/>
+          </a:effectRef>
+          <a:fontRef idx="minor">
+            <a:schemeClr val="lt1"/>
+          </a:fontRef>
+        </p:style>
+        <p:txBody>
+          <a:bodyPr rtlCol="0" anchor="ctr"/>
+          <a:p>
+            <a:pPr algn="ctr"/>
+            <a:r>
+              <a:rPr lang="en-US" altLang="zh-CN"/>
+              <a:t>Integration</a:t>
+            </a:r>
+            <a:endParaRPr lang="en-US" altLang="zh-CN"/>
+          </a:p>
+        </p:txBody>
+      </p:sp>
+      <p:sp>
+        <p:nvSpPr>
+          <p:cNvPr id="51" name="矩形 50"/>
+          <p:cNvSpPr/>
+          <p:nvPr/>
+        </p:nvSpPr>
+        <p:spPr>
+          <a:xfrm>
+            <a:off x="911860" y="1741170"/>
+            <a:ext cx="1621155" cy="2374265"/>
           </a:xfrm>
           <a:prstGeom prst="rect">
             <a:avLst/>
           </a:prstGeom>
         </p:spPr>
-      </p:pic>
+        <p:style>
+          <a:lnRef idx="2">
+            <a:schemeClr val="accent1">
+              <a:lumMod val="75000"/>
+            </a:schemeClr>
+          </a:lnRef>
+          <a:fillRef idx="1">
+            <a:schemeClr val="accent1"/>
+          </a:fillRef>
+          <a:effectRef idx="0">
+            <a:srgbClr val="FFFFFF"/>
+          </a:effectRef>
+          <a:fontRef idx="minor">
+            <a:schemeClr val="lt1"/>
+          </a:fontRef>
+        </p:style>
+        <p:txBody>
+          <a:bodyPr rtlCol="0" anchor="ctr"/>
+          <a:p>
+            <a:pPr algn="ctr"/>
+            <a:r>
+              <a:rPr lang="en-US" altLang="zh-CN"/>
+              <a:t>Define the usecase</a:t>
+            </a:r>
+            <a:endParaRPr lang="en-US" altLang="zh-CN"/>
+          </a:p>
+        </p:txBody>
+      </p:sp>
+      <p:sp>
+        <p:nvSpPr>
+          <p:cNvPr id="58" name="矩形 57"/>
+          <p:cNvSpPr/>
+          <p:nvPr/>
+        </p:nvSpPr>
+        <p:spPr>
+          <a:xfrm>
+            <a:off x="2632075" y="1741170"/>
+            <a:ext cx="1621155" cy="2374265"/>
+          </a:xfrm>
+          <a:prstGeom prst="rect">
+            <a:avLst/>
+          </a:prstGeom>
+        </p:spPr>
+        <p:style>
+          <a:lnRef idx="2">
+            <a:schemeClr val="accent1">
+              <a:lumMod val="75000"/>
+            </a:schemeClr>
+          </a:lnRef>
+          <a:fillRef idx="1">
+            <a:schemeClr val="accent1"/>
+          </a:fillRef>
+          <a:effectRef idx="0">
+            <a:srgbClr val="FFFFFF"/>
+          </a:effectRef>
+          <a:fontRef idx="minor">
+            <a:schemeClr val="lt1"/>
+          </a:fontRef>
+        </p:style>
+        <p:txBody>
+          <a:bodyPr rtlCol="0" anchor="ctr"/>
+          <a:p>
+            <a:pPr algn="ctr"/>
+            <a:r>
+              <a:rPr lang="en-US" altLang="zh-CN"/>
+              <a:t>Choose an existing model or pretain your own</a:t>
+            </a:r>
+            <a:endParaRPr lang="en-US" altLang="zh-CN"/>
+          </a:p>
+        </p:txBody>
+      </p:sp>
+      <p:sp>
+        <p:nvSpPr>
+          <p:cNvPr id="59" name="矩形 58"/>
+          <p:cNvSpPr/>
+          <p:nvPr/>
+        </p:nvSpPr>
+        <p:spPr>
+          <a:xfrm>
+            <a:off x="4352290" y="1741170"/>
+            <a:ext cx="1621155" cy="909955"/>
+          </a:xfrm>
+          <a:prstGeom prst="rect">
+            <a:avLst/>
+          </a:prstGeom>
+        </p:spPr>
+        <p:style>
+          <a:lnRef idx="2">
+            <a:schemeClr val="accent1">
+              <a:lumMod val="75000"/>
+            </a:schemeClr>
+          </a:lnRef>
+          <a:fillRef idx="1">
+            <a:schemeClr val="accent1"/>
+          </a:fillRef>
+          <a:effectRef idx="0">
+            <a:srgbClr val="FFFFFF"/>
+          </a:effectRef>
+          <a:fontRef idx="minor">
+            <a:schemeClr val="lt1"/>
+          </a:fontRef>
+        </p:style>
+        <p:txBody>
+          <a:bodyPr rtlCol="0" anchor="ctr"/>
+          <a:p>
+            <a:pPr algn="ctr"/>
+            <a:r>
+              <a:rPr lang="en-US" altLang="zh-CN"/>
+              <a:t>Prompt Engineering</a:t>
+            </a:r>
+            <a:endParaRPr lang="en-US" altLang="zh-CN"/>
+          </a:p>
+        </p:txBody>
+      </p:sp>
+      <p:sp>
+        <p:nvSpPr>
+          <p:cNvPr id="60" name="矩形 59"/>
+          <p:cNvSpPr/>
+          <p:nvPr/>
+        </p:nvSpPr>
+        <p:spPr>
+          <a:xfrm>
+            <a:off x="4352290" y="2756535"/>
+            <a:ext cx="1621155" cy="909955"/>
+          </a:xfrm>
+          <a:prstGeom prst="rect">
+            <a:avLst/>
+          </a:prstGeom>
+        </p:spPr>
+        <p:style>
+          <a:lnRef idx="2">
+            <a:schemeClr val="accent1">
+              <a:lumMod val="75000"/>
+            </a:schemeClr>
+          </a:lnRef>
+          <a:fillRef idx="1">
+            <a:schemeClr val="accent1"/>
+          </a:fillRef>
+          <a:effectRef idx="0">
+            <a:srgbClr val="FFFFFF"/>
+          </a:effectRef>
+          <a:fontRef idx="minor">
+            <a:schemeClr val="lt1"/>
+          </a:fontRef>
+        </p:style>
+        <p:txBody>
+          <a:bodyPr rtlCol="0" anchor="ctr"/>
+          <a:p>
+            <a:pPr algn="ctr"/>
+            <a:r>
+              <a:rPr lang="en-US" altLang="zh-CN"/>
+              <a:t>Fine-Tuning</a:t>
+            </a:r>
+            <a:endParaRPr lang="en-US" altLang="zh-CN"/>
+          </a:p>
+        </p:txBody>
+      </p:sp>
+      <p:sp>
+        <p:nvSpPr>
+          <p:cNvPr id="61" name="矩形 60"/>
+          <p:cNvSpPr/>
+          <p:nvPr/>
+        </p:nvSpPr>
+        <p:spPr>
+          <a:xfrm>
+            <a:off x="4352290" y="3771900"/>
+            <a:ext cx="1621155" cy="909955"/>
+          </a:xfrm>
+          <a:prstGeom prst="rect">
+            <a:avLst/>
+          </a:prstGeom>
+        </p:spPr>
+        <p:style>
+          <a:lnRef idx="2">
+            <a:schemeClr val="accent1">
+              <a:lumMod val="75000"/>
+            </a:schemeClr>
+          </a:lnRef>
+          <a:fillRef idx="1">
+            <a:schemeClr val="accent1"/>
+          </a:fillRef>
+          <a:effectRef idx="0">
+            <a:srgbClr val="FFFFFF"/>
+          </a:effectRef>
+          <a:fontRef idx="minor">
+            <a:schemeClr val="lt1"/>
+          </a:fontRef>
+        </p:style>
+        <p:txBody>
+          <a:bodyPr rtlCol="0" anchor="ctr"/>
+          <a:p>
+            <a:pPr algn="ctr"/>
+            <a:r>
+              <a:rPr lang="en-US" altLang="zh-CN"/>
+              <a:t>Align with Human Feedback</a:t>
+            </a:r>
+            <a:endParaRPr lang="en-US" altLang="zh-CN"/>
+          </a:p>
+        </p:txBody>
+      </p:sp>
+      <p:sp>
+        <p:nvSpPr>
+          <p:cNvPr id="62" name="矩形 61"/>
+          <p:cNvSpPr/>
+          <p:nvPr/>
+        </p:nvSpPr>
+        <p:spPr>
+          <a:xfrm>
+            <a:off x="6072505" y="1741170"/>
+            <a:ext cx="1621155" cy="2940685"/>
+          </a:xfrm>
+          <a:prstGeom prst="rect">
+            <a:avLst/>
+          </a:prstGeom>
+        </p:spPr>
+        <p:style>
+          <a:lnRef idx="2">
+            <a:schemeClr val="accent1">
+              <a:lumMod val="75000"/>
+            </a:schemeClr>
+          </a:lnRef>
+          <a:fillRef idx="1">
+            <a:schemeClr val="accent1"/>
+          </a:fillRef>
+          <a:effectRef idx="0">
+            <a:srgbClr val="FFFFFF"/>
+          </a:effectRef>
+          <a:fontRef idx="minor">
+            <a:schemeClr val="lt1"/>
+          </a:fontRef>
+        </p:style>
+        <p:txBody>
+          <a:bodyPr rtlCol="0" anchor="ctr"/>
+          <a:p>
+            <a:pPr algn="ctr"/>
+            <a:r>
+              <a:rPr lang="en-US" altLang="zh-CN"/>
+              <a:t>Evaluation</a:t>
+            </a:r>
+            <a:endParaRPr lang="en-US" altLang="zh-CN"/>
+          </a:p>
+        </p:txBody>
+      </p:sp>
+      <p:sp>
+        <p:nvSpPr>
+          <p:cNvPr id="63" name="矩形 62"/>
+          <p:cNvSpPr/>
+          <p:nvPr/>
+        </p:nvSpPr>
+        <p:spPr>
+          <a:xfrm>
+            <a:off x="7792720" y="1741170"/>
+            <a:ext cx="1621155" cy="2940685"/>
+          </a:xfrm>
+          <a:prstGeom prst="rect">
+            <a:avLst/>
+          </a:prstGeom>
+        </p:spPr>
+        <p:style>
+          <a:lnRef idx="2">
+            <a:schemeClr val="accent1">
+              <a:lumMod val="75000"/>
+            </a:schemeClr>
+          </a:lnRef>
+          <a:fillRef idx="1">
+            <a:schemeClr val="accent1"/>
+          </a:fillRef>
+          <a:effectRef idx="0">
+            <a:srgbClr val="FFFFFF"/>
+          </a:effectRef>
+          <a:fontRef idx="minor">
+            <a:schemeClr val="lt1"/>
+          </a:fontRef>
+        </p:style>
+        <p:txBody>
+          <a:bodyPr rtlCol="0" anchor="ctr"/>
+          <a:p>
+            <a:pPr algn="ctr"/>
+            <a:r>
+              <a:rPr lang="en-US" altLang="zh-CN"/>
+              <a:t>Optimize and Deploy model for Inference</a:t>
+            </a:r>
+            <a:endParaRPr lang="en-US" altLang="zh-CN"/>
+          </a:p>
+        </p:txBody>
+      </p:sp>
+      <p:sp>
+        <p:nvSpPr>
+          <p:cNvPr id="64" name="矩形 63"/>
+          <p:cNvSpPr/>
+          <p:nvPr/>
+        </p:nvSpPr>
+        <p:spPr>
+          <a:xfrm>
+            <a:off x="9512935" y="1741170"/>
+            <a:ext cx="1621155" cy="2940685"/>
+          </a:xfrm>
+          <a:prstGeom prst="rect">
+            <a:avLst/>
+          </a:prstGeom>
+        </p:spPr>
+        <p:style>
+          <a:lnRef idx="2">
+            <a:schemeClr val="accent1">
+              <a:lumMod val="75000"/>
+            </a:schemeClr>
+          </a:lnRef>
+          <a:fillRef idx="1">
+            <a:schemeClr val="accent1"/>
+          </a:fillRef>
+          <a:effectRef idx="0">
+            <a:srgbClr val="FFFFFF"/>
+          </a:effectRef>
+          <a:fontRef idx="minor">
+            <a:schemeClr val="lt1"/>
+          </a:fontRef>
+        </p:style>
+        <p:txBody>
+          <a:bodyPr rtlCol="0" anchor="ctr"/>
+          <a:p>
+            <a:pPr algn="ctr"/>
+            <a:r>
+              <a:rPr lang="en-US" altLang="zh-CN"/>
+              <a:t>Augment Model and build LLM-powered applications</a:t>
+            </a:r>
+            <a:endParaRPr lang="en-US" altLang="zh-CN"/>
+          </a:p>
+        </p:txBody>
+      </p:sp>
     </p:spTree>
   </p:cSld>
   <p:clrMapOvr>
@@ -18245,7 +18737,7 @@
 
 <file path=ppt/tags/tag98.xml><?xml version="1.0" encoding="utf-8"?>
 <p:tagLst xmlns:p="http://schemas.openxmlformats.org/presentationml/2006/main">
-  <p:tag name="resource_record_key" val="{&quot;65&quot;:[20231106],&quot;70&quot;:[3312268,3321416,3312913,3330466,3319064,3314103]}"/>
+  <p:tag name="resource_record_key" val="{&quot;65&quot;:[20236353],&quot;70&quot;:[3312268,3321416,3312913,3330466,3319064,3314103,3403268]}"/>
 </p:tagLst>
 </file>
 
